--- a/ppt/out/WLC2급_제08강_경제적웰다잉과재산·신상보호.pptx
+++ b/ppt/out/WLC2급_제08강_경제적웰다잉과재산·신상보호.pptx
@@ -159,7 +159,7 @@
   <p:extLst>
     <p:ext uri="{521415D9-36F7-43E2-AB2F-B90AF26B5E84}">
       <p14:sectionLst xmlns:p14="http://schemas.microsoft.com/office/powerpoint/2010/main">
-        <p14:section name="열기" id="{e017ff96-2ecd-d9c4-a2bd-a4f5c506eac0}">
+        <p14:section name="열기" id="{38528e5b-fdc0-8e52-1bc6-4a39b994a131}">
           <p14:sldIdLst>
             <p14:sldId id="256"/>
             <p14:sldId id="257"/>
@@ -172,7 +172,7 @@
             <p14:sldId id="264"/>
           </p14:sldIdLst>
         </p14:section>
-        <p14:section name="1교시 재산·유언·상속의 기본" id="{ec32e983-cc9c-373b-bd22-820408a1442b}">
+        <p14:section name="1교시 재산·유언·상속의 기본" id="{b566d4fc-d01c-b230-4e36-66c03ea220b0}">
           <p14:sldIdLst>
             <p14:sldId id="265"/>
             <p14:sldId id="266"/>
@@ -186,7 +186,7 @@
             <p14:sldId id="274"/>
           </p14:sldIdLst>
         </p14:section>
-        <p14:section name="2교시 유류분·후견·경제적 학대" id="{8dba0f29-6fd0-248f-f98a-e86bf1e4b155}">
+        <p14:section name="2교시 유류분·후견·경제적 학대" id="{c1480e7c-216e-6945-494c-2bb2543bd3db}">
           <p14:sldIdLst>
             <p14:sldId id="275"/>
             <p14:sldId id="276"/>
@@ -204,7 +204,7 @@
             <p14:sldId id="288"/>
           </p14:sldIdLst>
         </p14:section>
-        <p14:section name="3교시 삶의 안전을 설계하다" id="{c7b26433-9cb6-932b-2e66-a88647abf7a0}">
+        <p14:section name="3교시 삶의 안전을 설계하다" id="{26c2f2b6-3582-21cd-19b5-bb0fb28fc0da}">
           <p14:sldIdLst>
             <p14:sldId id="289"/>
             <p14:sldId id="290"/>
@@ -222,7 +222,7 @@
             <p14:sldId id="302"/>
           </p14:sldIdLst>
         </p14:section>
-        <p14:section name="정리와 예고" id="{54731dd7-f254-2676-9def-7435a22be09c}">
+        <p14:section name="정리와 예고" id="{a97b02dd-f2ca-9da0-1b46-282b693f65d6}">
           <p14:sldIdLst>
             <p14:sldId id="303"/>
             <p14:sldId id="304"/>
@@ -6477,7 +6477,7 @@
         <p:spPr>
           <a:xfrm>
             <a:off x="548640" y="2560320"/>
-            <a:ext cx="9144000" cy="1097280"/>
+            <a:ext cx="10607040" cy="1097280"/>
           </a:xfrm>
           <a:prstGeom prst="rect">
             <a:avLst/>
@@ -53754,47 +53754,47 @@
 </file>
 
 <file path=ppt/theme/theme1.xml><?xml version="1.0" encoding="utf-8"?>
-<a:theme xmlns:a="http://schemas.openxmlformats.org/drawingml/2006/main" name="WLC Teal">
+<a:theme xmlns:a="http://schemas.openxmlformats.org/drawingml/2006/main" name="Office Theme">
   <a:themeElements>
-    <a:clrScheme name="WLC Teal">
+    <a:clrScheme name="Office">
       <a:dk1>
-        <a:srgbClr val="222222"/>
+        <a:sysClr val="windowText" lastClr="000000"/>
       </a:dk1>
       <a:lt1>
-        <a:srgbClr val="FFFFFF"/>
+        <a:sysClr val="window" lastClr="FFFFFF"/>
       </a:lt1>
       <a:dk2>
-        <a:srgbClr val="1F4E4A"/>
+        <a:srgbClr val="44546A"/>
       </a:dk2>
       <a:lt2>
-        <a:srgbClr val="EAF3F0"/>
+        <a:srgbClr val="E7E6E6"/>
       </a:lt2>
       <a:accent1>
-        <a:srgbClr val="2E7D6B"/>
+        <a:srgbClr val="4472C4"/>
       </a:accent1>
       <a:accent2>
-        <a:srgbClr val="D98E04"/>
+        <a:srgbClr val="ED7D31"/>
       </a:accent2>
       <a:accent3>
-        <a:srgbClr val="3A6EA5"/>
+        <a:srgbClr val="A5A5A5"/>
       </a:accent3>
       <a:accent4>
-        <a:srgbClr val="B5452F"/>
+        <a:srgbClr val="FFC000"/>
       </a:accent4>
       <a:accent5>
-        <a:srgbClr val="8FB9A8"/>
+        <a:srgbClr val="5B9BD5"/>
       </a:accent5>
       <a:accent6>
-        <a:srgbClr val="6B6B6B"/>
+        <a:srgbClr val="70AD47"/>
       </a:accent6>
       <a:hlink>
-        <a:srgbClr val="3A6EA5"/>
+        <a:srgbClr val="0563C1"/>
       </a:hlink>
       <a:folHlink>
-        <a:srgbClr val="1F4E4A"/>
+        <a:srgbClr val="954F72"/>
       </a:folHlink>
     </a:clrScheme>
-    <a:fontScheme name="WLC Teal">
+    <a:fontScheme name="Office">
       <a:majorFont>
         <a:latin typeface="Noto Serif KR Black"/>
         <a:ea typeface=""/>

--- a/ppt/out/WLC2급_제08강_경제적웰다잉과재산·신상보호.pptx
+++ b/ppt/out/WLC2급_제08강_경제적웰다잉과재산·신상보호.pptx
@@ -159,7 +159,7 @@
   <p:extLst>
     <p:ext uri="{521415D9-36F7-43E2-AB2F-B90AF26B5E84}">
       <p14:sectionLst xmlns:p14="http://schemas.microsoft.com/office/powerpoint/2010/main">
-        <p14:section name="열기" id="{38528e5b-fdc0-8e52-1bc6-4a39b994a131}">
+        <p14:section name="열기" id="{b448388a-3325-0219-597a-8ed14c4ffb79}">
           <p14:sldIdLst>
             <p14:sldId id="256"/>
             <p14:sldId id="257"/>
@@ -172,7 +172,7 @@
             <p14:sldId id="264"/>
           </p14:sldIdLst>
         </p14:section>
-        <p14:section name="1교시 재산·유언·상속의 기본" id="{b566d4fc-d01c-b230-4e36-66c03ea220b0}">
+        <p14:section name="1교시 재산·유언·상속의 기본" id="{171fc2b4-7656-a0b3-bb2e-24855f81eae0}">
           <p14:sldIdLst>
             <p14:sldId id="265"/>
             <p14:sldId id="266"/>
@@ -186,7 +186,7 @@
             <p14:sldId id="274"/>
           </p14:sldIdLst>
         </p14:section>
-        <p14:section name="2교시 유류분·후견·경제적 학대" id="{c1480e7c-216e-6945-494c-2bb2543bd3db}">
+        <p14:section name="2교시 유류분·후견·경제적 학대" id="{276b91cd-ffe9-3b6f-1354-66307798ec7a}">
           <p14:sldIdLst>
             <p14:sldId id="275"/>
             <p14:sldId id="276"/>
@@ -204,7 +204,7 @@
             <p14:sldId id="288"/>
           </p14:sldIdLst>
         </p14:section>
-        <p14:section name="3교시 삶의 안전을 설계하다" id="{26c2f2b6-3582-21cd-19b5-bb0fb28fc0da}">
+        <p14:section name="3교시 삶의 안전을 설계하다" id="{5475634a-1d7f-08c8-98fa-25a23e394380}">
           <p14:sldIdLst>
             <p14:sldId id="289"/>
             <p14:sldId id="290"/>
@@ -222,7 +222,7 @@
             <p14:sldId id="302"/>
           </p14:sldIdLst>
         </p14:section>
-        <p14:section name="정리와 예고" id="{a97b02dd-f2ca-9da0-1b46-282b693f65d6}">
+        <p14:section name="정리와 예고" id="{12cadfb1-3386-b7dd-d92c-95b7ac21ef27}">
           <p14:sldIdLst>
             <p14:sldId id="303"/>
             <p14:sldId id="304"/>
@@ -53754,47 +53754,47 @@
 </file>
 
 <file path=ppt/theme/theme1.xml><?xml version="1.0" encoding="utf-8"?>
-<a:theme xmlns:a="http://schemas.openxmlformats.org/drawingml/2006/main" name="Office Theme">
+<a:theme xmlns:a="http://schemas.openxmlformats.org/drawingml/2006/main" name="WLC Teal">
   <a:themeElements>
-    <a:clrScheme name="Office">
+    <a:clrScheme name="WLC Teal">
       <a:dk1>
-        <a:sysClr val="windowText" lastClr="000000"/>
+        <a:srgbClr val="222222"/>
       </a:dk1>
       <a:lt1>
-        <a:sysClr val="window" lastClr="FFFFFF"/>
+        <a:srgbClr val="FFFFFF"/>
       </a:lt1>
       <a:dk2>
-        <a:srgbClr val="44546A"/>
+        <a:srgbClr val="1F4E4A"/>
       </a:dk2>
       <a:lt2>
-        <a:srgbClr val="E7E6E6"/>
+        <a:srgbClr val="EAF3F0"/>
       </a:lt2>
       <a:accent1>
-        <a:srgbClr val="4472C4"/>
+        <a:srgbClr val="2E7D6B"/>
       </a:accent1>
       <a:accent2>
-        <a:srgbClr val="ED7D31"/>
+        <a:srgbClr val="D98E04"/>
       </a:accent2>
       <a:accent3>
-        <a:srgbClr val="A5A5A5"/>
+        <a:srgbClr val="3A6EA5"/>
       </a:accent3>
       <a:accent4>
-        <a:srgbClr val="FFC000"/>
+        <a:srgbClr val="B5452F"/>
       </a:accent4>
       <a:accent5>
-        <a:srgbClr val="5B9BD5"/>
+        <a:srgbClr val="8FB9A8"/>
       </a:accent5>
       <a:accent6>
-        <a:srgbClr val="70AD47"/>
+        <a:srgbClr val="6B6B6B"/>
       </a:accent6>
       <a:hlink>
-        <a:srgbClr val="0563C1"/>
+        <a:srgbClr val="3A6EA5"/>
       </a:hlink>
       <a:folHlink>
-        <a:srgbClr val="954F72"/>
+        <a:srgbClr val="1F4E4A"/>
       </a:folHlink>
     </a:clrScheme>
-    <a:fontScheme name="Office">
+    <a:fontScheme name="WLC Teal">
       <a:majorFont>
         <a:latin typeface="Noto Serif KR Black"/>
         <a:ea typeface=""/>
